--- a/Software Design/21. Lambda Architecture.pptx
+++ b/Software Design/21. Lambda Architecture.pptx
@@ -266,7 +266,7 @@
             <a:fld id="{C0912C56-9914-4E1B-8096-3F8D8B76373A}" type="datetimeFigureOut">
               <a:rPr lang="en-US" smtClean="0"/>
               <a:pPr/>
-              <a:t>7/29/2025</a:t>
+              <a:t>8/14/2026</a:t>
             </a:fld>
             <a:endParaRPr lang="en-US"/>
           </a:p>
@@ -805,7 +805,7 @@
               <a:pPr>
                 <a:defRPr/>
               </a:pPr>
-              <a:t>7/29/2025</a:t>
+              <a:t>8/14/2026</a:t>
             </a:fld>
             <a:endParaRPr lang="en-US"/>
           </a:p>
@@ -997,7 +997,7 @@
               <a:pPr>
                 <a:defRPr/>
               </a:pPr>
-              <a:t>7/29/2025</a:t>
+              <a:t>8/14/2026</a:t>
             </a:fld>
             <a:endParaRPr lang="en-US"/>
           </a:p>
@@ -1199,7 +1199,7 @@
               <a:pPr>
                 <a:defRPr/>
               </a:pPr>
-              <a:t>7/29/2025</a:t>
+              <a:t>8/14/2026</a:t>
             </a:fld>
             <a:endParaRPr lang="en-US"/>
           </a:p>
@@ -1391,7 +1391,7 @@
               <a:pPr>
                 <a:defRPr/>
               </a:pPr>
-              <a:t>7/29/2025</a:t>
+              <a:t>8/14/2026</a:t>
             </a:fld>
             <a:endParaRPr lang="en-US"/>
           </a:p>
@@ -1659,7 +1659,7 @@
               <a:pPr>
                 <a:defRPr/>
               </a:pPr>
-              <a:t>7/29/2025</a:t>
+              <a:t>8/14/2026</a:t>
             </a:fld>
             <a:endParaRPr lang="en-US"/>
           </a:p>
@@ -1969,7 +1969,7 @@
               <a:pPr>
                 <a:defRPr/>
               </a:pPr>
-              <a:t>7/29/2025</a:t>
+              <a:t>8/14/2026</a:t>
             </a:fld>
             <a:endParaRPr lang="en-US"/>
           </a:p>
@@ -2413,7 +2413,7 @@
               <a:pPr>
                 <a:defRPr/>
               </a:pPr>
-              <a:t>7/29/2025</a:t>
+              <a:t>8/14/2026</a:t>
             </a:fld>
             <a:endParaRPr lang="en-US"/>
           </a:p>
@@ -2553,7 +2553,7 @@
               <a:pPr>
                 <a:defRPr/>
               </a:pPr>
-              <a:t>7/29/2025</a:t>
+              <a:t>8/14/2026</a:t>
             </a:fld>
             <a:endParaRPr lang="en-US"/>
           </a:p>
@@ -2670,7 +2670,7 @@
               <a:pPr>
                 <a:defRPr/>
               </a:pPr>
-              <a:t>7/29/2025</a:t>
+              <a:t>8/14/2026</a:t>
             </a:fld>
             <a:endParaRPr lang="en-US"/>
           </a:p>
@@ -2969,7 +2969,7 @@
               <a:pPr>
                 <a:defRPr/>
               </a:pPr>
-              <a:t>7/29/2025</a:t>
+              <a:t>8/14/2026</a:t>
             </a:fld>
             <a:endParaRPr lang="en-US"/>
           </a:p>
@@ -3247,7 +3247,7 @@
               <a:pPr>
                 <a:defRPr/>
               </a:pPr>
-              <a:t>7/29/2025</a:t>
+              <a:t>8/14/2026</a:t>
             </a:fld>
             <a:endParaRPr lang="en-US"/>
           </a:p>
@@ -3495,7 +3495,7 @@
               <a:pPr>
                 <a:defRPr/>
               </a:pPr>
-              <a:t>7/29/2025</a:t>
+              <a:t>8/14/2026</a:t>
             </a:fld>
             <a:endParaRPr lang="en-US"/>
           </a:p>
@@ -7886,33 +7886,45 @@
           <a:lstStyle/>
           <a:p>
             <a:r>
-              <a:rPr lang="en-US" sz="2000" dirty="0" smtClean="0">
+              <a:rPr lang="en-US" sz="2400" dirty="0" smtClean="0">
                 <a:hlinkClick r:id="rId2"/>
               </a:rPr>
               <a:t>https://milinda.pathirage.org/kappa-architecture.com/</a:t>
             </a:r>
-            <a:endParaRPr lang="en-US" sz="2000" dirty="0" smtClean="0"/>
-          </a:p>
-          <a:p>
-            <a:r>
-              <a:rPr lang="en-US" sz="2000" dirty="0" smtClean="0"/>
+            <a:endParaRPr lang="en-US" sz="2400" dirty="0" smtClean="0"/>
+          </a:p>
+          <a:p>
+            <a:r>
+              <a:rPr lang="en-US" sz="2400" dirty="0" smtClean="0"/>
               <a:t>Kappa Architecture is a simplification of Lambda Architecture.</a:t>
             </a:r>
           </a:p>
           <a:p>
             <a:r>
-              <a:rPr lang="en-US" sz="2000" dirty="0" smtClean="0"/>
-              <a:t>A Kappa Architecture system is like a Lambda Architecture system with the batch processing system removed.</a:t>
-            </a:r>
-          </a:p>
-          <a:p>
-            <a:r>
-              <a:rPr lang="en-US" sz="2000" dirty="0" smtClean="0"/>
+              <a:rPr lang="en-US" sz="2400" dirty="0" smtClean="0"/>
+              <a:t>A Kappa Architecture system is like a Lambda Architecture system with </a:t>
+            </a:r>
+            <a:r>
+              <a:rPr lang="en-US" sz="2400" i="1" dirty="0" smtClean="0">
+                <a:solidFill>
+                  <a:srgbClr val="C00000"/>
+                </a:solidFill>
+              </a:rPr>
+              <a:t>the batch processing system removed</a:t>
+            </a:r>
+            <a:r>
+              <a:rPr lang="en-US" sz="2400" dirty="0" smtClean="0"/>
+              <a:t>.</a:t>
+            </a:r>
+          </a:p>
+          <a:p>
+            <a:r>
+              <a:rPr lang="en-US" sz="2400" dirty="0" smtClean="0"/>
               <a:t>To replace batch processing, data is simply fed through the streaming system quickly.</a:t>
             </a:r>
           </a:p>
           <a:p>
-            <a:endParaRPr lang="en-US" sz="2000" dirty="0" smtClean="0"/>
+            <a:endParaRPr lang="en-US" sz="2400" dirty="0" smtClean="0"/>
           </a:p>
         </p:txBody>
       </p:sp>
@@ -7958,7 +7970,11 @@
           <a:p>
             <a:r>
               <a:rPr lang="en-US" dirty="0" smtClean="0"/>
-              <a:t>Lambda Architecture</a:t>
+              <a:t>Lambda </a:t>
+            </a:r>
+            <a:r>
+              <a:rPr lang="en-US" dirty="0" smtClean="0"/>
+              <a:t>Architecture</a:t>
             </a:r>
             <a:endParaRPr lang="en-US" dirty="0"/>
           </a:p>
@@ -8334,11 +8350,7 @@
           <a:p>
             <a:r>
               <a:rPr lang="en-US" dirty="0" smtClean="0"/>
-              <a:t>Apache </a:t>
-            </a:r>
-            <a:r>
-              <a:rPr lang="en-US" dirty="0" smtClean="0"/>
-              <a:t>Beam</a:t>
+              <a:t>Apache Beam</a:t>
             </a:r>
             <a:endParaRPr lang="en-US" dirty="0"/>
           </a:p>
@@ -8360,65 +8372,39 @@
           <a:lstStyle/>
           <a:p>
             <a:r>
-              <a:rPr lang="en-US" sz="2200" dirty="0" smtClean="0">
+              <a:rPr lang="en-US" sz="2400" dirty="0" smtClean="0">
                 <a:hlinkClick r:id="rId2"/>
               </a:rPr>
-              <a:t>https://beam.apache.org/get-started/beam-overview</a:t>
-            </a:r>
-            <a:r>
-              <a:rPr lang="en-US" sz="2200" dirty="0" smtClean="0">
-                <a:hlinkClick r:id="rId2"/>
-              </a:rPr>
-              <a:t>/</a:t>
-            </a:r>
-            <a:endParaRPr lang="en-US" sz="2200" dirty="0" smtClean="0"/>
-          </a:p>
-          <a:p>
-            <a:r>
-              <a:rPr lang="en-US" sz="2200" dirty="0" smtClean="0"/>
-              <a:t>Apache </a:t>
-            </a:r>
-            <a:r>
-              <a:rPr lang="en-US" sz="2200" dirty="0" smtClean="0"/>
-              <a:t>Beam is an open source, unified model for defining both batch and streaming data-parallel processing pipelines</a:t>
-            </a:r>
-            <a:r>
-              <a:rPr lang="en-US" sz="2200" dirty="0" smtClean="0"/>
-              <a:t>.</a:t>
-            </a:r>
-          </a:p>
-          <a:p>
-            <a:r>
-              <a:rPr lang="en-US" sz="2200" dirty="0" smtClean="0"/>
-              <a:t>Using </a:t>
-            </a:r>
-            <a:r>
-              <a:rPr lang="en-US" sz="2200" dirty="0" smtClean="0"/>
-              <a:t>one of the open source Beam SDKs, you build a program that defines the </a:t>
-            </a:r>
-            <a:r>
-              <a:rPr lang="en-US" sz="2200" dirty="0" smtClean="0"/>
-              <a:t>pipeline.</a:t>
-            </a:r>
-          </a:p>
-          <a:p>
-            <a:r>
-              <a:rPr lang="en-US" sz="2200" dirty="0" smtClean="0"/>
-              <a:t>The </a:t>
-            </a:r>
-            <a:r>
-              <a:rPr lang="en-US" sz="2200" dirty="0" smtClean="0"/>
-              <a:t>pipeline is then executed by one of Beam’s supported distributed processing back-ends, which include Apache </a:t>
-            </a:r>
-            <a:r>
-              <a:rPr lang="en-US" sz="2200" dirty="0" err="1" smtClean="0"/>
+              <a:t>https://beam.apache.org/get-started/beam-overview/</a:t>
+            </a:r>
+            <a:endParaRPr lang="en-US" sz="2400" dirty="0" smtClean="0"/>
+          </a:p>
+          <a:p>
+            <a:r>
+              <a:rPr lang="en-US" sz="2400" dirty="0" smtClean="0"/>
+              <a:t>Apache Beam is an open source, unified model for defining both batch and streaming data-parallel processing pipelines.</a:t>
+            </a:r>
+          </a:p>
+          <a:p>
+            <a:r>
+              <a:rPr lang="en-US" sz="2400" dirty="0" smtClean="0"/>
+              <a:t>Using one of the open source Beam SDKs, you build a program that defines the pipeline.</a:t>
+            </a:r>
+          </a:p>
+          <a:p>
+            <a:r>
+              <a:rPr lang="en-US" sz="2400" dirty="0" smtClean="0"/>
+              <a:t>The pipeline is then executed by one of Beam’s supported distributed processing back-ends, which include Apache </a:t>
+            </a:r>
+            <a:r>
+              <a:rPr lang="en-US" sz="2400" dirty="0" err="1" smtClean="0"/>
               <a:t>Flink</a:t>
             </a:r>
             <a:r>
-              <a:rPr lang="en-US" sz="2200" dirty="0" smtClean="0"/>
+              <a:rPr lang="en-US" sz="2400" dirty="0" smtClean="0"/>
               <a:t>, Apache Spark, and Google Cloud Dataflow.</a:t>
             </a:r>
-            <a:endParaRPr lang="en-US" sz="2200" dirty="0"/>
+            <a:endParaRPr lang="en-US" sz="2400" dirty="0"/>
           </a:p>
         </p:txBody>
       </p:sp>
@@ -8538,51 +8524,37 @@
           <a:p>
             <a:r>
               <a:rPr lang="en-US" dirty="0" smtClean="0"/>
-              <a:t>Apache Beam </a:t>
-            </a:r>
+              <a:t>Apache Beam SDKs</a:t>
+            </a:r>
+            <a:endParaRPr lang="en-US" dirty="0"/>
+          </a:p>
+        </p:txBody>
+      </p:sp>
+      <p:sp>
+        <p:nvSpPr>
+          <p:cNvPr id="3" name="Content Placeholder 2"/>
+          <p:cNvSpPr>
+            <a:spLocks noGrp="1"/>
+          </p:cNvSpPr>
+          <p:nvPr>
+            <p:ph idx="1"/>
+          </p:nvPr>
+        </p:nvSpPr>
+        <p:spPr/>
+        <p:txBody>
+          <a:bodyPr/>
+          <a:lstStyle/>
+          <a:p>
             <a:r>
               <a:rPr lang="en-US" dirty="0" smtClean="0"/>
-              <a:t>SDKs</a:t>
-            </a:r>
-            <a:endParaRPr lang="en-US" dirty="0"/>
-          </a:p>
-        </p:txBody>
-      </p:sp>
-      <p:sp>
-        <p:nvSpPr>
-          <p:cNvPr id="3" name="Content Placeholder 2"/>
-          <p:cNvSpPr>
-            <a:spLocks noGrp="1"/>
-          </p:cNvSpPr>
-          <p:nvPr>
-            <p:ph idx="1"/>
-          </p:nvPr>
-        </p:nvSpPr>
-        <p:spPr/>
-        <p:txBody>
-          <a:bodyPr/>
-          <a:lstStyle/>
+              <a:t>Apache Beam Java SDK Java</a:t>
+            </a:r>
+          </a:p>
           <a:p>
             <a:r>
               <a:rPr lang="en-US" dirty="0" smtClean="0"/>
-              <a:t>Apache Beam Java SDK </a:t>
-            </a:r>
-            <a:r>
-              <a:rPr lang="en-US" dirty="0" smtClean="0"/>
-              <a:t>Java</a:t>
-            </a:r>
-            <a:endParaRPr lang="en-US" dirty="0" smtClean="0"/>
-          </a:p>
-          <a:p>
-            <a:r>
-              <a:rPr lang="en-US" dirty="0" smtClean="0"/>
-              <a:t>Apache Beam Python SDK </a:t>
-            </a:r>
-            <a:r>
-              <a:rPr lang="en-US" dirty="0" smtClean="0"/>
-              <a:t>Python</a:t>
-            </a:r>
-            <a:endParaRPr lang="en-US" dirty="0" smtClean="0"/>
+              <a:t>Apache Beam Python SDK Python</a:t>
+            </a:r>
           </a:p>
           <a:p>
             <a:r>
@@ -8672,13 +8644,8 @@
             </a:r>
             <a:r>
               <a:rPr lang="en-US" dirty="0" smtClean="0"/>
-              <a:t> </a:t>
-            </a:r>
-            <a:r>
-              <a:rPr lang="en-US" dirty="0" smtClean="0"/>
-              <a:t>Runner</a:t>
-            </a:r>
-            <a:endParaRPr lang="en-US" dirty="0" smtClean="0"/>
+              <a:t> Runner</a:t>
+            </a:r>
           </a:p>
           <a:p>
             <a:r>
@@ -8705,35 +8672,20 @@
             </a:r>
             <a:r>
               <a:rPr lang="en-US" dirty="0" smtClean="0"/>
-              <a:t> </a:t>
-            </a:r>
+              <a:t> Runner</a:t>
+            </a:r>
+          </a:p>
+          <a:p>
             <a:r>
               <a:rPr lang="en-US" dirty="0" smtClean="0"/>
-              <a:t>Runner</a:t>
-            </a:r>
-            <a:endParaRPr lang="en-US" dirty="0" smtClean="0"/>
+              <a:t>Apache Spark Runner</a:t>
+            </a:r>
           </a:p>
           <a:p>
             <a:r>
               <a:rPr lang="en-US" dirty="0" smtClean="0"/>
-              <a:t>Apache Spark </a:t>
-            </a:r>
-            <a:r>
-              <a:rPr lang="en-US" dirty="0" smtClean="0"/>
-              <a:t>Runner</a:t>
-            </a:r>
-            <a:endParaRPr lang="en-US" dirty="0" smtClean="0"/>
-          </a:p>
-          <a:p>
-            <a:r>
-              <a:rPr lang="en-US" dirty="0" smtClean="0"/>
-              <a:t>Google Cloud Dataflow </a:t>
-            </a:r>
-            <a:r>
-              <a:rPr lang="en-US" dirty="0" smtClean="0"/>
-              <a:t>Runner</a:t>
-            </a:r>
-            <a:endParaRPr lang="en-US" dirty="0" smtClean="0"/>
+              <a:t>Google Cloud Dataflow Runner</a:t>
+            </a:r>
           </a:p>
           <a:p>
             <a:r>
@@ -8742,13 +8694,8 @@
             </a:r>
             <a:r>
               <a:rPr lang="en-US" dirty="0" smtClean="0"/>
-              <a:t> Jet </a:t>
-            </a:r>
-            <a:r>
-              <a:rPr lang="en-US" dirty="0" smtClean="0"/>
-              <a:t>Runner</a:t>
-            </a:r>
-            <a:endParaRPr lang="en-US" dirty="0" smtClean="0"/>
+              <a:t> Jet Runner</a:t>
+            </a:r>
           </a:p>
           <a:p>
             <a:r>
